--- a/docs/presentation/CivicGate-Milestone-2.pptx
+++ b/docs/presentation/CivicGate-Milestone-2.pptx
@@ -4482,7 +4482,7 @@
                 <a:ea typeface="Arial"/>
                 <a:cs typeface="Arial"/>
               </a:rPr>
-              <a:t>84 tests passed locally</a:t>
+              <a:t>88 tests passed locally</a:t>
             </a:r>
           </a:p>
         </p:txBody>
